--- a/report/EC418_slides.pptx
+++ b/report/EC418_slides.pptx
@@ -656,7 +656,7 @@
           <a:lstStyle/>
           <a:p>
             <a:r>
-              <a:t>The literature audit codes whether published CirCor papers use expert segmentation on test data; its result will be added after the two coders finish. The case study shows why headline numbers differ: a recent paper reports a balanced accuracy with test segments cut at expert S1 labels, which is not on the same scale as our AUROC.</a:t>
+              <a:t>The literature audit codes whether published CirCor papers use expert segmentation on test data; its result will be added once the coding of the random sample is complete. The case study shows why headline numbers differ: a recent paper reports a balanced accuracy with test segments cut at expert S1 labels, which is not on the same scale as our AUROC.</a:t>
             </a:r>
           </a:p>
         </p:txBody>
@@ -4628,7 +4628,7 @@
                   <a:srgbClr val="1F1F1E"/>
                 </a:solidFill>
               </a:rPr>
-              <a:t>• EC418 team — author names to be added</a:t>
+              <a:t>• Parth Mishra — National Institute of Technology Warangal</a:t>
             </a:r>
           </a:p>
         </p:txBody>
@@ -5027,7 +5027,7 @@
               </a:defRPr>
             </a:pPr>
             <a:r>
-              <a:t>G3b audit result — to be added after coding (sample of 30 records, two blind coders)</a:t>
+              <a:t>G3b audit result — to be added after coding (random sample of 30 records; test–retest on 10)</a:t>
             </a:r>
           </a:p>
         </p:txBody>

--- a/report/EC418_slides.pptx
+++ b/report/EC418_slides.pptx
@@ -5718,7 +5718,7 @@
                   <a:srgbClr val="1F1F1E"/>
                 </a:solidFill>
               </a:rPr>
-              <a:t>• Pre-registration tags: v1.0-pilot, protocol-v2-lock, e1b/diag/e4/s1-prereg, protocol-v3-prereg</a:t>
+              <a:t>• Pre-registration tags: v1.0-pilot, protocol-v2-lock, e1b/diag/e4/s1-prereg; protocol-v3-prereg in the cloud-sandbox history</a:t>
             </a:r>
           </a:p>
           <a:p>

--- a/report/EC418_slides.pptx
+++ b/report/EC418_slides.pptx
@@ -656,7 +656,7 @@
           <a:lstStyle/>
           <a:p>
             <a:r>
-              <a:t>The literature audit codes whether published CirCor papers use expert segmentation on test data; its result will be added once the coding of the random sample is complete. The case study shows why headline numbers differ: a recent paper reports a balanced accuracy with test segments cut at expert S1 labels, which is not on the same scale as our AUROC.</a:t>
+              <a:t>Recent papers report much higher numbers than ours, and these two show why they are not on the same scale. One reports a balanced accuracy at a single threshold with test segments cut at expert S1 labels; the other reports snippet accuracy on annotated periods. On the same balanced-accuracy scale our expert-label model is far lower.</a:t>
             </a:r>
           </a:p>
         </p:txBody>
@@ -796,7 +796,7 @@
           <a:lstStyle/>
           <a:p>
             <a:r>
-              <a:t>Timing matters, the transform does not, and a simple whole-signal model transfers to an independent CHD cohort with the expected physiological ordering. Future work is quality gating for noisy recordings, learned models under the same protocol, and a murmur-labelled external set.</a:t>
+              <a:t>Timing matters, the transform does not, and a simple whole-signal model transfers to an independent CHD cohort with the expected physiological ordering. Future work is quality gating for noisy recordings, learned models under the same protocol, a murmur-labelled external set, and a systematic audit of test-time expert segmentation in the literature.</a:t>
             </a:r>
           </a:p>
         </p:txBody>
@@ -4930,7 +4930,7 @@
               </a:defRPr>
             </a:pPr>
             <a:r>
-              <a:t>Literature audit and a 2026 comparison</a:t>
+              <a:t>Comparison with recent work</a:t>
             </a:r>
           </a:p>
         </p:txBody>
@@ -4980,68 +4980,14 @@
       </p:sp>
       <p:sp>
         <p:nvSpPr>
-          <p:cNvPr id="4" name="Rounded Rectangle 3"/>
-          <p:cNvSpPr/>
+          <p:cNvPr id="4" name="TextBox 3"/>
+          <p:cNvSpPr txBox="1"/>
           <p:nvPr/>
         </p:nvSpPr>
         <p:spPr>
           <a:xfrm>
-            <a:off x="548640" y="1463040"/>
-            <a:ext cx="11064240" cy="914400"/>
-          </a:xfrm>
-          <a:prstGeom prst="roundRect">
-            <a:avLst/>
-          </a:prstGeom>
-          <a:solidFill>
-            <a:srgbClr val="EDEDE8"/>
-          </a:solidFill>
-          <a:ln>
-            <a:solidFill>
-              <a:srgbClr val="6B6A64"/>
-            </a:solidFill>
-          </a:ln>
-        </p:spPr>
-        <p:style>
-          <a:lnRef idx="1">
-            <a:schemeClr val="accent1"/>
-          </a:lnRef>
-          <a:fillRef idx="3">
-            <a:schemeClr val="accent1"/>
-          </a:fillRef>
-          <a:effectRef idx="2">
-            <a:schemeClr val="accent1"/>
-          </a:effectRef>
-          <a:fontRef idx="minor">
-            <a:schemeClr val="lt1"/>
-          </a:fontRef>
-        </p:style>
-        <p:txBody>
-          <a:bodyPr rtlCol="0" anchor="ctr" wrap="square"/>
-          <a:lstStyle/>
-          <a:p>
-            <a:pPr algn="ctr">
-              <a:defRPr sz="2000">
-                <a:solidFill>
-                  <a:srgbClr val="6B6A64"/>
-                </a:solidFill>
-              </a:defRPr>
-            </a:pPr>
-            <a:r>
-              <a:t>G3b audit result — to be added after coding (random sample of 30 records; test–retest on 10)</a:t>
-            </a:r>
-          </a:p>
-        </p:txBody>
-      </p:sp>
-      <p:sp>
-        <p:nvSpPr>
-          <p:cNvPr id="5" name="TextBox 4"/>
-          <p:cNvSpPr txBox="1"/>
-          <p:nvPr/>
-        </p:nvSpPr>
-        <p:spPr>
-          <a:xfrm>
-            <a:off x="548640" y="2651760"/>
-            <a:ext cx="11064240" cy="3931920"/>
+            <a:off x="548640" y="1554480"/>
+            <a:ext cx="11064240" cy="4754880"/>
           </a:xfrm>
           <a:prstGeom prst="rect">
             <a:avLst/>
@@ -5060,7 +5006,7 @@
               </a:spcAft>
             </a:pPr>
             <a:r>
-              <a:rPr sz="2000" b="1">
+              <a:rPr sz="2200" b="1">
                 <a:solidFill>
                   <a:srgbClr val="1F1F1E"/>
                 </a:solidFill>
@@ -5068,7 +5014,7 @@
               <a:t>• Nogueira et al. 2026: </a:t>
             </a:r>
             <a:r>
-              <a:rPr sz="2000" b="0">
+              <a:rPr sz="2200" b="0">
                 <a:solidFill>
                   <a:srgbClr val="1F1F1E"/>
                 </a:solidFill>
@@ -5083,7 +5029,7 @@
               </a:spcAft>
             </a:pPr>
             <a:r>
-              <a:rPr sz="2000" b="0">
+              <a:rPr sz="2200" b="0">
                 <a:solidFill>
                   <a:srgbClr val="1F1F1E"/>
                 </a:solidFill>
@@ -5098,7 +5044,7 @@
               </a:spcAft>
             </a:pPr>
             <a:r>
-              <a:rPr sz="2000" b="0">
+              <a:rPr sz="2200" b="0">
                 <a:solidFill>
                   <a:srgbClr val="1F1F1E"/>
                 </a:solidFill>
@@ -5113,7 +5059,7 @@
               </a:spcAft>
             </a:pPr>
             <a:r>
-              <a:rPr sz="2000" b="0">
+              <a:rPr sz="2200" b="0">
                 <a:solidFill>
                   <a:srgbClr val="1F1F1E"/>
                 </a:solidFill>
@@ -5128,7 +5074,7 @@
               </a:spcAft>
             </a:pPr>
             <a:r>
-              <a:rPr sz="2000" b="0">
+              <a:rPr sz="2200" b="0">
                 <a:solidFill>
                   <a:srgbClr val="1F1F1E"/>
                 </a:solidFill>
@@ -5585,6 +5531,21 @@
                 </a:solidFill>
               </a:rPr>
               <a:t>• Next: quality gating, learned models under the same protocol, murmur-labelled external data</a:t>
+            </a:r>
+          </a:p>
+          <a:p>
+            <a:pPr>
+              <a:spcAft>
+                <a:spcPts val="800"/>
+              </a:spcAft>
+            </a:pPr>
+            <a:r>
+              <a:rPr sz="2400" b="0">
+                <a:solidFill>
+                  <a:srgbClr val="1F1F1E"/>
+                </a:solidFill>
+              </a:rPr>
+              <a:t>• Future: a systematic audit of test-time expert segmentation in published CirCor work</a:t>
             </a:r>
           </a:p>
         </p:txBody>

--- a/report/EC418_slides.pptx
+++ b/report/EC418_slides.pptx
@@ -1496,7 +1496,7 @@
           <a:lstStyle/>
           <a:p>
             <a:r>
-              <a:t>With a learned span detector the automatic pipeline matches expert labels. But its span fraction is itself predictive, so we built a shortcut-free version, E4q. E4q keeps the AUROC and beats random windows, yet its margin over a whole-signal STFT baseline with the same span information has a confidence interval that touches zero, so that advantage is not established.</a:t>
+              <a:t>With a learned span detector the automatic pipeline comes within the pre-registered margin of expert labels on the point estimate, although the confidence interval is too wide to establish non-inferiority. Its span fraction is also predictive, so we built a shortcut-free version, E4q. E4q keeps the AUROC and beats random windows, yet its margin over a whole-signal STFT baseline with the same span information has a confidence interval that touches zero, so that advantage is not established.</a:t>
             </a:r>
           </a:p>
         </p:txBody>
@@ -4532,7 +4532,7 @@
               </a:defRPr>
             </a:pPr>
             <a:r>
-              <a:t>Timing, Not Transform</a:t>
+              <a:t>Physiology-Aligned Multiresolution Analysis</a:t>
             </a:r>
           </a:p>
         </p:txBody>
@@ -4613,7 +4613,7 @@
                   <a:srgbClr val="1F1F1E"/>
                 </a:solidFill>
               </a:rPr>
-              <a:t>• Shortcut-controlled and externally validated murmur detection on CirCor</a:t>
+              <a:t>• for Patient-Independent Heart-Murmur Detection: a comparative study of wavelet and Fourier features</a:t>
             </a:r>
           </a:p>
           <a:p>
@@ -8779,7 +8779,7 @@
                   <a:srgbClr val="1F1F1E"/>
                 </a:solidFill>
               </a:rPr>
-              <a:t>−0.007 to −0.005, non-inferior</a:t>
+              <a:t>−0.007 to −0.005; rule met, non-inferiority not established</a:t>
             </a:r>
           </a:p>
           <a:p>
